--- a/MLOps/42 - Course project/Course project.pptx
+++ b/MLOps/42 - Course project/Course project.pptx
@@ -128,7 +128,7 @@
           <a:p>
             <a:fld id="{CED1C788-56A1-2E45-A024-5C42A74F7F0E}" type="datetimeFigureOut">
               <a:rPr lang="en-US" smtClean="0"/>
-              <a:t>10/3/24</a:t>
+              <a:t>11/5/24</a:t>
             </a:fld>
             <a:endParaRPr lang="en-US"/>
           </a:p>
@@ -1757,7 +1757,7 @@
           <a:p>
             <a:fld id="{1D8BD707-D9CF-40AE-B4C6-C98DA3205C09}" type="datetimeFigureOut">
               <a:rPr lang="en-US"/>
-              <a:t>10/3/24</a:t>
+              <a:t>11/5/24</a:t>
             </a:fld>
             <a:endParaRPr lang="en-US"/>
           </a:p>
@@ -1934,7 +1934,7 @@
           <a:p>
             <a:fld id="{1D8BD707-D9CF-40AE-B4C6-C98DA3205C09}" type="datetimeFigureOut">
               <a:rPr lang="en-US"/>
-              <a:t>10/3/24</a:t>
+              <a:t>11/5/24</a:t>
             </a:fld>
             <a:endParaRPr lang="en-US"/>
           </a:p>
@@ -2160,7 +2160,7 @@
           <a:p>
             <a:fld id="{1D8BD707-D9CF-40AE-B4C6-C98DA3205C09}" type="datetimeFigureOut">
               <a:rPr lang="en-US"/>
-              <a:t>10/3/24</a:t>
+              <a:t>11/5/24</a:t>
             </a:fld>
             <a:endParaRPr lang="en-US"/>
           </a:p>
@@ -2338,7 +2338,7 @@
           <a:p>
             <a:fld id="{1D8BD707-D9CF-40AE-B4C6-C98DA3205C09}" type="datetimeFigureOut">
               <a:rPr lang="en-US"/>
-              <a:t>10/3/24</a:t>
+              <a:t>11/5/24</a:t>
             </a:fld>
             <a:endParaRPr lang="en-US"/>
           </a:p>
@@ -2457,7 +2457,7 @@
           <a:p>
             <a:fld id="{1D8BD707-D9CF-40AE-B4C6-C98DA3205C09}" type="datetimeFigureOut">
               <a:rPr lang="en-US"/>
-              <a:t>10/3/24</a:t>
+              <a:t>11/5/24</a:t>
             </a:fld>
             <a:endParaRPr lang="en-US"/>
           </a:p>
@@ -4609,7 +4609,7 @@
           <a:p>
             <a:fld id="{1D8BD707-D9CF-40AE-B4C6-C98DA3205C09}" type="datetimeFigureOut">
               <a:rPr lang="en-US"/>
-              <a:t>10/3/24</a:t>
+              <a:t>11/5/24</a:t>
             </a:fld>
             <a:endParaRPr lang="en-US"/>
           </a:p>
@@ -9160,7 +9160,7 @@
                 <a:latin typeface="Calibri"/>
                 <a:cs typeface="Calibri"/>
               </a:rPr>
-              <a:t>08</a:t>
+              <a:t>05</a:t>
             </a:r>
             <a:r>
               <a:rPr sz="1400" dirty="0">
@@ -9186,7 +9186,7 @@
                 <a:latin typeface="Calibri"/>
                 <a:cs typeface="Calibri"/>
               </a:rPr>
-              <a:t>08</a:t>
+              <a:t>11</a:t>
             </a:r>
             <a:r>
               <a:rPr sz="1400" spc="-40" dirty="0">
@@ -9257,25 +9257,32 @@
               </a:spcBef>
             </a:pPr>
             <a:r>
+              <a:rPr lang="ru-RU" sz="1400" dirty="0">
+                <a:latin typeface="Calibri"/>
+                <a:cs typeface="Calibri"/>
+              </a:rPr>
+              <a:t>14</a:t>
+            </a:r>
+            <a:r>
+              <a:rPr sz="1400" dirty="0">
+                <a:latin typeface="Calibri"/>
+                <a:cs typeface="Calibri"/>
+              </a:rPr>
+              <a:t>.</a:t>
+            </a:r>
+            <a:r>
               <a:rPr lang="en-US" sz="1400" dirty="0">
                 <a:latin typeface="Calibri"/>
                 <a:cs typeface="Calibri"/>
               </a:rPr>
-              <a:t>03</a:t>
-            </a:r>
-            <a:r>
-              <a:rPr sz="1400" dirty="0">
+              <a:t>1</a:t>
+            </a:r>
+            <a:r>
+              <a:rPr lang="ru-RU" sz="1400" dirty="0">
                 <a:latin typeface="Calibri"/>
                 <a:cs typeface="Calibri"/>
               </a:rPr>
-              <a:t>.</a:t>
-            </a:r>
-            <a:r>
-              <a:rPr lang="en-US" sz="1400" dirty="0">
-                <a:latin typeface="Calibri"/>
-                <a:cs typeface="Calibri"/>
-              </a:rPr>
-              <a:t>10</a:t>
+              <a:t>1</a:t>
             </a:r>
             <a:r>
               <a:rPr sz="1400" spc="-35" dirty="0">
@@ -9332,7 +9339,7 @@
                 <a:latin typeface="Calibri"/>
                 <a:cs typeface="Calibri"/>
               </a:rPr>
-              <a:t>0</a:t>
+              <a:t>2</a:t>
             </a:r>
             <a:r>
               <a:rPr lang="en-US" sz="1400" dirty="0">
@@ -9353,7 +9360,14 @@
                 <a:latin typeface="Calibri"/>
                 <a:cs typeface="Calibri"/>
               </a:rPr>
-              <a:t>10</a:t>
+              <a:t>1</a:t>
+            </a:r>
+            <a:r>
+              <a:rPr lang="ru-RU" sz="1400" dirty="0">
+                <a:latin typeface="Calibri"/>
+                <a:cs typeface="Calibri"/>
+              </a:rPr>
+              <a:t>1</a:t>
             </a:r>
             <a:r>
               <a:rPr sz="1400" spc="-35" dirty="0">
@@ -9412,24 +9426,24 @@
               </a:spcBef>
             </a:pPr>
             <a:r>
+              <a:rPr lang="ru-RU" sz="1400" dirty="0">
+                <a:latin typeface="Calibri"/>
+                <a:cs typeface="Calibri"/>
+              </a:rPr>
+              <a:t>02</a:t>
+            </a:r>
+            <a:r>
+              <a:rPr sz="1400" dirty="0">
+                <a:latin typeface="Calibri"/>
+                <a:cs typeface="Calibri"/>
+              </a:rPr>
+              <a:t>.</a:t>
+            </a:r>
+            <a:r>
               <a:rPr lang="en-US" sz="1400" dirty="0">
                 <a:latin typeface="Calibri"/>
                 <a:cs typeface="Calibri"/>
               </a:rPr>
-              <a:t>11</a:t>
-            </a:r>
-            <a:r>
-              <a:rPr sz="1400" dirty="0">
-                <a:latin typeface="Calibri"/>
-                <a:cs typeface="Calibri"/>
-              </a:rPr>
-              <a:t>.</a:t>
-            </a:r>
-            <a:r>
-              <a:rPr lang="en-US" sz="1400" dirty="0">
-                <a:latin typeface="Calibri"/>
-                <a:cs typeface="Calibri"/>
-              </a:rPr>
               <a:t>1</a:t>
             </a:r>
             <a:r>
@@ -9437,7 +9451,7 @@
                 <a:latin typeface="Calibri"/>
                 <a:cs typeface="Calibri"/>
               </a:rPr>
-              <a:t>0</a:t>
+              <a:t>2</a:t>
             </a:r>
             <a:r>
               <a:rPr sz="1400" spc="-35" dirty="0">
@@ -9700,6 +9714,66 @@
           <a:ln>
             <a:noFill/>
           </a:ln>
+          <a:effectLst/>
+        </p:spPr>
+        <p:style>
+          <a:lnRef idx="2">
+            <a:schemeClr val="accent1">
+              <a:shade val="50000"/>
+            </a:schemeClr>
+          </a:lnRef>
+          <a:fillRef idx="1">
+            <a:schemeClr val="accent1"/>
+          </a:fillRef>
+          <a:effectRef idx="0">
+            <a:schemeClr val="accent1"/>
+          </a:effectRef>
+          <a:fontRef idx="minor">
+            <a:schemeClr val="lt1"/>
+          </a:fontRef>
+        </p:style>
+        <p:txBody>
+          <a:bodyPr rtlCol="0" anchor="ctr"/>
+          <a:lstStyle/>
+          <a:p>
+            <a:pPr algn="l"/>
+            <a:r>
+              <a:rPr lang="ru-RU" sz="1400" dirty="0">
+                <a:solidFill>
+                  <a:schemeClr val="tx1"/>
+                </a:solidFill>
+              </a:rPr>
+              <a:t>Консультация по проектам и домашним заданиям</a:t>
+            </a:r>
+          </a:p>
+        </p:txBody>
+      </p:sp>
+      <p:sp>
+        <p:nvSpPr>
+          <p:cNvPr id="27" name="Rounded Rectangle 26">
+            <a:extLst>
+              <a:ext uri="{FF2B5EF4-FFF2-40B4-BE49-F238E27FC236}">
+                <a16:creationId xmlns:a16="http://schemas.microsoft.com/office/drawing/2014/main" id="{612C9734-FC8F-C24C-940E-4BD2B5FA68F3}"/>
+              </a:ext>
+            </a:extLst>
+          </p:cNvPr>
+          <p:cNvSpPr/>
+          <p:nvPr/>
+        </p:nvSpPr>
+        <p:spPr>
+          <a:xfrm>
+            <a:off x="2225090" y="1857286"/>
+            <a:ext cx="5356225" cy="396240"/>
+          </a:xfrm>
+          <a:prstGeom prst="roundRect">
+            <a:avLst/>
+          </a:prstGeom>
+          <a:solidFill>
+            <a:srgbClr val="FFD966"/>
+          </a:solidFill>
+          <a:ln>
+            <a:noFill/>
+          </a:ln>
           <a:effectLst>
             <a:glow rad="139700">
               <a:schemeClr val="accent1">
@@ -9734,70 +9808,6 @@
               <a:rPr lang="ru-RU" sz="1400" dirty="0">
                 <a:solidFill>
                   <a:schemeClr val="tx1"/>
-                </a:solidFill>
-              </a:rPr>
-              <a:t>Консультация по проектам и домашним заданиям</a:t>
-            </a:r>
-          </a:p>
-        </p:txBody>
-      </p:sp>
-      <p:sp>
-        <p:nvSpPr>
-          <p:cNvPr id="27" name="Rounded Rectangle 26">
-            <a:extLst>
-              <a:ext uri="{FF2B5EF4-FFF2-40B4-BE49-F238E27FC236}">
-                <a16:creationId xmlns:a16="http://schemas.microsoft.com/office/drawing/2014/main" id="{612C9734-FC8F-C24C-940E-4BD2B5FA68F3}"/>
-              </a:ext>
-            </a:extLst>
-          </p:cNvPr>
-          <p:cNvSpPr/>
-          <p:nvPr/>
-        </p:nvSpPr>
-        <p:spPr>
-          <a:xfrm>
-            <a:off x="2225090" y="1857286"/>
-            <a:ext cx="5356225" cy="396240"/>
-          </a:xfrm>
-          <a:prstGeom prst="roundRect">
-            <a:avLst/>
-          </a:prstGeom>
-          <a:solidFill>
-            <a:schemeClr val="bg1">
-              <a:lumMod val="85000"/>
-            </a:schemeClr>
-          </a:solidFill>
-          <a:ln>
-            <a:noFill/>
-          </a:ln>
-        </p:spPr>
-        <p:style>
-          <a:lnRef idx="2">
-            <a:schemeClr val="accent1">
-              <a:shade val="50000"/>
-            </a:schemeClr>
-          </a:lnRef>
-          <a:fillRef idx="1">
-            <a:schemeClr val="accent1"/>
-          </a:fillRef>
-          <a:effectRef idx="0">
-            <a:schemeClr val="accent1"/>
-          </a:effectRef>
-          <a:fontRef idx="minor">
-            <a:schemeClr val="lt1"/>
-          </a:fontRef>
-        </p:style>
-        <p:txBody>
-          <a:bodyPr rtlCol="0" anchor="ctr"/>
-          <a:lstStyle/>
-          <a:p>
-            <a:pPr algn="l"/>
-            <a:r>
-              <a:rPr lang="ru-RU" sz="1400" dirty="0">
-                <a:solidFill>
-                  <a:schemeClr val="tx1">
-                    <a:lumMod val="65000"/>
-                    <a:lumOff val="35000"/>
-                  </a:schemeClr>
                 </a:solidFill>
               </a:rPr>
               <a:t>Выбор темы и организация проектной работы</a:t>

--- a/MLOps/42 - Course project/Course project.pptx
+++ b/MLOps/42 - Course project/Course project.pptx
@@ -128,7 +128,7 @@
           <a:p>
             <a:fld id="{CED1C788-56A1-2E45-A024-5C42A74F7F0E}" type="datetimeFigureOut">
               <a:rPr lang="en-US" smtClean="0"/>
-              <a:t>11/5/24</a:t>
+              <a:t>2/19/25</a:t>
             </a:fld>
             <a:endParaRPr lang="en-US"/>
           </a:p>
@@ -1757,7 +1757,7 @@
           <a:p>
             <a:fld id="{1D8BD707-D9CF-40AE-B4C6-C98DA3205C09}" type="datetimeFigureOut">
               <a:rPr lang="en-US"/>
-              <a:t>11/5/24</a:t>
+              <a:t>2/19/25</a:t>
             </a:fld>
             <a:endParaRPr lang="en-US"/>
           </a:p>
@@ -1934,7 +1934,7 @@
           <a:p>
             <a:fld id="{1D8BD707-D9CF-40AE-B4C6-C98DA3205C09}" type="datetimeFigureOut">
               <a:rPr lang="en-US"/>
-              <a:t>11/5/24</a:t>
+              <a:t>2/19/25</a:t>
             </a:fld>
             <a:endParaRPr lang="en-US"/>
           </a:p>
@@ -2160,7 +2160,7 @@
           <a:p>
             <a:fld id="{1D8BD707-D9CF-40AE-B4C6-C98DA3205C09}" type="datetimeFigureOut">
               <a:rPr lang="en-US"/>
-              <a:t>11/5/24</a:t>
+              <a:t>2/19/25</a:t>
             </a:fld>
             <a:endParaRPr lang="en-US"/>
           </a:p>
@@ -2338,7 +2338,7 @@
           <a:p>
             <a:fld id="{1D8BD707-D9CF-40AE-B4C6-C98DA3205C09}" type="datetimeFigureOut">
               <a:rPr lang="en-US"/>
-              <a:t>11/5/24</a:t>
+              <a:t>2/19/25</a:t>
             </a:fld>
             <a:endParaRPr lang="en-US"/>
           </a:p>
@@ -2457,7 +2457,7 @@
           <a:p>
             <a:fld id="{1D8BD707-D9CF-40AE-B4C6-C98DA3205C09}" type="datetimeFigureOut">
               <a:rPr lang="en-US"/>
-              <a:t>11/5/24</a:t>
+              <a:t>2/19/25</a:t>
             </a:fld>
             <a:endParaRPr lang="en-US"/>
           </a:p>
@@ -4609,7 +4609,7 @@
           <a:p>
             <a:fld id="{1D8BD707-D9CF-40AE-B4C6-C98DA3205C09}" type="datetimeFigureOut">
               <a:rPr lang="en-US"/>
-              <a:t>11/5/24</a:t>
+              <a:t>2/19/25</a:t>
             </a:fld>
             <a:endParaRPr lang="en-US"/>
           </a:p>
@@ -9150,7 +9150,7 @@
               </a:spcBef>
             </a:pPr>
             <a:r>
-              <a:rPr lang="ru-RU" sz="1400" dirty="0">
+              <a:rPr lang="en-US" sz="1400" dirty="0">
                 <a:solidFill>
                   <a:schemeClr val="tx1">
                     <a:lumMod val="65000"/>
@@ -9160,7 +9160,7 @@
                 <a:latin typeface="Calibri"/>
                 <a:cs typeface="Calibri"/>
               </a:rPr>
-              <a:t>05</a:t>
+              <a:t>19</a:t>
             </a:r>
             <a:r>
               <a:rPr sz="1400" dirty="0">
@@ -9176,7 +9176,7 @@
               <a:t>.</a:t>
             </a:r>
             <a:r>
-              <a:rPr lang="ru-RU" sz="1400" dirty="0">
+              <a:rPr lang="en-US" sz="1400" dirty="0">
                 <a:solidFill>
                   <a:schemeClr val="tx1">
                     <a:lumMod val="65000"/>
@@ -9186,7 +9186,7 @@
                 <a:latin typeface="Calibri"/>
                 <a:cs typeface="Calibri"/>
               </a:rPr>
-              <a:t>11</a:t>
+              <a:t>02</a:t>
             </a:r>
             <a:r>
               <a:rPr sz="1400" spc="-40" dirty="0">
@@ -9257,11 +9257,11 @@
               </a:spcBef>
             </a:pPr>
             <a:r>
-              <a:rPr lang="ru-RU" sz="1400" dirty="0">
+              <a:rPr lang="en-US" sz="1400" dirty="0">
                 <a:latin typeface="Calibri"/>
                 <a:cs typeface="Calibri"/>
               </a:rPr>
-              <a:t>14</a:t>
+              <a:t>06</a:t>
             </a:r>
             <a:r>
               <a:rPr sz="1400" dirty="0">
@@ -9275,14 +9275,7 @@
                 <a:latin typeface="Calibri"/>
                 <a:cs typeface="Calibri"/>
               </a:rPr>
-              <a:t>1</a:t>
-            </a:r>
-            <a:r>
-              <a:rPr lang="ru-RU" sz="1400" dirty="0">
-                <a:latin typeface="Calibri"/>
-                <a:cs typeface="Calibri"/>
-              </a:rPr>
-              <a:t>1</a:t>
+              <a:t>03</a:t>
             </a:r>
             <a:r>
               <a:rPr sz="1400" spc="-35" dirty="0">
@@ -9346,7 +9339,7 @@
                 <a:latin typeface="Calibri"/>
                 <a:cs typeface="Calibri"/>
               </a:rPr>
-              <a:t>9</a:t>
+              <a:t>1</a:t>
             </a:r>
             <a:r>
               <a:rPr sz="1400" dirty="0">
@@ -9360,14 +9353,7 @@
                 <a:latin typeface="Calibri"/>
                 <a:cs typeface="Calibri"/>
               </a:rPr>
-              <a:t>1</a:t>
-            </a:r>
-            <a:r>
-              <a:rPr lang="ru-RU" sz="1400" dirty="0">
-                <a:latin typeface="Calibri"/>
-                <a:cs typeface="Calibri"/>
-              </a:rPr>
-              <a:t>1</a:t>
+              <a:t>03</a:t>
             </a:r>
             <a:r>
               <a:rPr sz="1400" spc="-35" dirty="0">
@@ -9426,11 +9412,11 @@
               </a:spcBef>
             </a:pPr>
             <a:r>
-              <a:rPr lang="ru-RU" sz="1400" dirty="0">
+              <a:rPr lang="en-US" sz="1400" dirty="0">
                 <a:latin typeface="Calibri"/>
                 <a:cs typeface="Calibri"/>
               </a:rPr>
-              <a:t>02</a:t>
+              <a:t>24</a:t>
             </a:r>
             <a:r>
               <a:rPr sz="1400" dirty="0">
@@ -9444,14 +9430,7 @@
                 <a:latin typeface="Calibri"/>
                 <a:cs typeface="Calibri"/>
               </a:rPr>
-              <a:t>1</a:t>
-            </a:r>
-            <a:r>
-              <a:rPr lang="ru-RU" sz="1400" dirty="0">
-                <a:latin typeface="Calibri"/>
-                <a:cs typeface="Calibri"/>
-              </a:rPr>
-              <a:t>2</a:t>
+              <a:t>03</a:t>
             </a:r>
             <a:r>
               <a:rPr sz="1400" spc="-35" dirty="0">

--- a/MLOps/42 - Course project/Course project.pptx
+++ b/MLOps/42 - Course project/Course project.pptx
@@ -128,7 +128,7 @@
           <a:p>
             <a:fld id="{CED1C788-56A1-2E45-A024-5C42A74F7F0E}" type="datetimeFigureOut">
               <a:rPr lang="en-US" smtClean="0"/>
-              <a:t>2/19/25</a:t>
+              <a:t>5/27/25</a:t>
             </a:fld>
             <a:endParaRPr lang="en-US"/>
           </a:p>
@@ -1757,7 +1757,7 @@
           <a:p>
             <a:fld id="{1D8BD707-D9CF-40AE-B4C6-C98DA3205C09}" type="datetimeFigureOut">
               <a:rPr lang="en-US"/>
-              <a:t>2/19/25</a:t>
+              <a:t>5/27/25</a:t>
             </a:fld>
             <a:endParaRPr lang="en-US"/>
           </a:p>
@@ -1934,7 +1934,7 @@
           <a:p>
             <a:fld id="{1D8BD707-D9CF-40AE-B4C6-C98DA3205C09}" type="datetimeFigureOut">
               <a:rPr lang="en-US"/>
-              <a:t>2/19/25</a:t>
+              <a:t>5/27/25</a:t>
             </a:fld>
             <a:endParaRPr lang="en-US"/>
           </a:p>
@@ -2160,7 +2160,7 @@
           <a:p>
             <a:fld id="{1D8BD707-D9CF-40AE-B4C6-C98DA3205C09}" type="datetimeFigureOut">
               <a:rPr lang="en-US"/>
-              <a:t>2/19/25</a:t>
+              <a:t>5/27/25</a:t>
             </a:fld>
             <a:endParaRPr lang="en-US"/>
           </a:p>
@@ -2338,7 +2338,7 @@
           <a:p>
             <a:fld id="{1D8BD707-D9CF-40AE-B4C6-C98DA3205C09}" type="datetimeFigureOut">
               <a:rPr lang="en-US"/>
-              <a:t>2/19/25</a:t>
+              <a:t>5/27/25</a:t>
             </a:fld>
             <a:endParaRPr lang="en-US"/>
           </a:p>
@@ -2457,7 +2457,7 @@
           <a:p>
             <a:fld id="{1D8BD707-D9CF-40AE-B4C6-C98DA3205C09}" type="datetimeFigureOut">
               <a:rPr lang="en-US"/>
-              <a:t>2/19/25</a:t>
+              <a:t>5/27/25</a:t>
             </a:fld>
             <a:endParaRPr lang="en-US"/>
           </a:p>
@@ -4609,7 +4609,7 @@
           <a:p>
             <a:fld id="{1D8BD707-D9CF-40AE-B4C6-C98DA3205C09}" type="datetimeFigureOut">
               <a:rPr lang="en-US"/>
-              <a:t>2/19/25</a:t>
+              <a:t>5/27/25</a:t>
             </a:fld>
             <a:endParaRPr lang="en-US"/>
           </a:p>
@@ -9152,23 +9152,17 @@
             <a:r>
               <a:rPr lang="en-US" sz="1400" dirty="0">
                 <a:solidFill>
-                  <a:schemeClr val="tx1">
-                    <a:lumMod val="65000"/>
-                    <a:lumOff val="35000"/>
-                  </a:schemeClr>
+                  <a:schemeClr val="tx1"/>
                 </a:solidFill>
                 <a:latin typeface="Calibri"/>
                 <a:cs typeface="Calibri"/>
               </a:rPr>
-              <a:t>19</a:t>
+              <a:t>27</a:t>
             </a:r>
             <a:r>
               <a:rPr sz="1400" dirty="0">
                 <a:solidFill>
-                  <a:schemeClr val="tx1">
-                    <a:lumMod val="65000"/>
-                    <a:lumOff val="35000"/>
-                  </a:schemeClr>
+                  <a:schemeClr val="tx1"/>
                 </a:solidFill>
                 <a:latin typeface="Calibri"/>
                 <a:cs typeface="Calibri"/>
@@ -9178,23 +9172,17 @@
             <a:r>
               <a:rPr lang="en-US" sz="1400" dirty="0">
                 <a:solidFill>
-                  <a:schemeClr val="tx1">
-                    <a:lumMod val="65000"/>
-                    <a:lumOff val="35000"/>
-                  </a:schemeClr>
+                  <a:schemeClr val="tx1"/>
                 </a:solidFill>
                 <a:latin typeface="Calibri"/>
                 <a:cs typeface="Calibri"/>
               </a:rPr>
-              <a:t>02</a:t>
+              <a:t>05</a:t>
             </a:r>
             <a:r>
               <a:rPr sz="1400" spc="-40" dirty="0">
                 <a:solidFill>
-                  <a:schemeClr val="tx1">
-                    <a:lumMod val="65000"/>
-                    <a:lumOff val="35000"/>
-                  </a:schemeClr>
+                  <a:schemeClr val="tx1"/>
                 </a:solidFill>
                 <a:latin typeface="Calibri"/>
                 <a:cs typeface="Calibri"/>
@@ -9204,10 +9192,7 @@
             <a:r>
               <a:rPr sz="1400" spc="-50" dirty="0">
                 <a:solidFill>
-                  <a:schemeClr val="tx1">
-                    <a:lumMod val="65000"/>
-                    <a:lumOff val="35000"/>
-                  </a:schemeClr>
+                  <a:schemeClr val="tx1"/>
                 </a:solidFill>
                 <a:latin typeface="Calibri"/>
                 <a:cs typeface="Calibri"/>
@@ -9216,10 +9201,7 @@
             </a:r>
             <a:endParaRPr sz="1400" dirty="0">
               <a:solidFill>
-                <a:schemeClr val="tx1">
-                  <a:lumMod val="65000"/>
-                  <a:lumOff val="35000"/>
-                </a:schemeClr>
+                <a:schemeClr val="tx1"/>
               </a:solidFill>
               <a:latin typeface="Calibri"/>
               <a:cs typeface="Calibri"/>
@@ -9261,7 +9243,7 @@
                 <a:latin typeface="Calibri"/>
                 <a:cs typeface="Calibri"/>
               </a:rPr>
-              <a:t>06</a:t>
+              <a:t>23</a:t>
             </a:r>
             <a:r>
               <a:rPr sz="1400" dirty="0">
@@ -9275,7 +9257,7 @@
                 <a:latin typeface="Calibri"/>
                 <a:cs typeface="Calibri"/>
               </a:rPr>
-              <a:t>03</a:t>
+              <a:t>06</a:t>
             </a:r>
             <a:r>
               <a:rPr sz="1400" spc="-35" dirty="0">
@@ -9328,18 +9310,11 @@
               </a:spcBef>
             </a:pPr>
             <a:r>
-              <a:rPr lang="ru-RU" sz="1400" dirty="0">
-                <a:latin typeface="Calibri"/>
-                <a:cs typeface="Calibri"/>
-              </a:rPr>
-              <a:t>2</a:t>
-            </a:r>
-            <a:r>
               <a:rPr lang="en-US" sz="1400" dirty="0">
                 <a:latin typeface="Calibri"/>
                 <a:cs typeface="Calibri"/>
               </a:rPr>
-              <a:t>1</a:t>
+              <a:t>01</a:t>
             </a:r>
             <a:r>
               <a:rPr sz="1400" dirty="0">
@@ -9353,7 +9328,7 @@
                 <a:latin typeface="Calibri"/>
                 <a:cs typeface="Calibri"/>
               </a:rPr>
-              <a:t>03</a:t>
+              <a:t>07</a:t>
             </a:r>
             <a:r>
               <a:rPr sz="1400" spc="-35" dirty="0">
@@ -9416,7 +9391,7 @@
                 <a:latin typeface="Calibri"/>
                 <a:cs typeface="Calibri"/>
               </a:rPr>
-              <a:t>24</a:t>
+              <a:t>04</a:t>
             </a:r>
             <a:r>
               <a:rPr sz="1400" dirty="0">
@@ -9430,7 +9405,7 @@
                 <a:latin typeface="Calibri"/>
                 <a:cs typeface="Calibri"/>
               </a:rPr>
-              <a:t>03</a:t>
+              <a:t>07</a:t>
             </a:r>
             <a:r>
               <a:rPr sz="1400" spc="-35" dirty="0">

--- a/MLOps/42 - Course project/Course project.pptx
+++ b/MLOps/42 - Course project/Course project.pptx
@@ -128,7 +128,7 @@
           <a:p>
             <a:fld id="{CED1C788-56A1-2E45-A024-5C42A74F7F0E}" type="datetimeFigureOut">
               <a:rPr lang="en-US" smtClean="0"/>
-              <a:t>5/27/25</a:t>
+              <a:t>9/8/25</a:t>
             </a:fld>
             <a:endParaRPr lang="en-US"/>
           </a:p>
@@ -1757,7 +1757,7 @@
           <a:p>
             <a:fld id="{1D8BD707-D9CF-40AE-B4C6-C98DA3205C09}" type="datetimeFigureOut">
               <a:rPr lang="en-US"/>
-              <a:t>5/27/25</a:t>
+              <a:t>9/8/25</a:t>
             </a:fld>
             <a:endParaRPr lang="en-US"/>
           </a:p>
@@ -1934,7 +1934,7 @@
           <a:p>
             <a:fld id="{1D8BD707-D9CF-40AE-B4C6-C98DA3205C09}" type="datetimeFigureOut">
               <a:rPr lang="en-US"/>
-              <a:t>5/27/25</a:t>
+              <a:t>9/8/25</a:t>
             </a:fld>
             <a:endParaRPr lang="en-US"/>
           </a:p>
@@ -2160,7 +2160,7 @@
           <a:p>
             <a:fld id="{1D8BD707-D9CF-40AE-B4C6-C98DA3205C09}" type="datetimeFigureOut">
               <a:rPr lang="en-US"/>
-              <a:t>5/27/25</a:t>
+              <a:t>9/8/25</a:t>
             </a:fld>
             <a:endParaRPr lang="en-US"/>
           </a:p>
@@ -2338,7 +2338,7 @@
           <a:p>
             <a:fld id="{1D8BD707-D9CF-40AE-B4C6-C98DA3205C09}" type="datetimeFigureOut">
               <a:rPr lang="en-US"/>
-              <a:t>5/27/25</a:t>
+              <a:t>9/8/25</a:t>
             </a:fld>
             <a:endParaRPr lang="en-US"/>
           </a:p>
@@ -2457,7 +2457,7 @@
           <a:p>
             <a:fld id="{1D8BD707-D9CF-40AE-B4C6-C98DA3205C09}" type="datetimeFigureOut">
               <a:rPr lang="en-US"/>
-              <a:t>5/27/25</a:t>
+              <a:t>9/8/25</a:t>
             </a:fld>
             <a:endParaRPr lang="en-US"/>
           </a:p>
@@ -4609,7 +4609,7 @@
           <a:p>
             <a:fld id="{1D8BD707-D9CF-40AE-B4C6-C98DA3205C09}" type="datetimeFigureOut">
               <a:rPr lang="en-US"/>
-              <a:t>5/27/25</a:t>
+              <a:t>9/8/25</a:t>
             </a:fld>
             <a:endParaRPr lang="en-US"/>
           </a:p>
@@ -5619,10 +5619,10 @@
       </p:sp>
       <p:sp>
         <p:nvSpPr>
-          <p:cNvPr id="11" name="Google Shape;209;p48">
+          <p:cNvPr id="9" name="Google Shape;209;p48">
             <a:extLst>
               <a:ext uri="{FF2B5EF4-FFF2-40B4-BE49-F238E27FC236}">
-                <a16:creationId xmlns:a16="http://schemas.microsoft.com/office/drawing/2014/main" id="{D033A29A-5C61-8440-A7AA-1A792E6BB829}"/>
+                <a16:creationId xmlns:a16="http://schemas.microsoft.com/office/drawing/2014/main" id="{666D51A8-B86A-A04E-A7A6-A30E8E367D45}"/>
               </a:ext>
             </a:extLst>
           </p:cNvPr>
@@ -5947,7 +5947,15 @@
             <a:pPr rtl="0"/>
             <a:r>
               <a:rPr lang="ru-RU" sz="1150" kern="0" dirty="0"/>
-              <a:t>Более 15 лет занимался прикладной математикой и мат моделированием</a:t>
+              <a:t>Более </a:t>
+            </a:r>
+            <a:r>
+              <a:rPr lang="ru-RU" sz="1150" dirty="0"/>
+              <a:t>20</a:t>
+            </a:r>
+            <a:r>
+              <a:rPr lang="ru-RU" sz="1150" kern="0" dirty="0"/>
+              <a:t> лет занимался прикладной математикой и мат моделированием</a:t>
             </a:r>
           </a:p>
           <a:p>
@@ -5962,7 +5970,7 @@
             </a:r>
             <a:r>
               <a:rPr lang="ru-RU" sz="1150" kern="0" dirty="0"/>
-              <a:t>С++) в НИИ ПАО Газпром</a:t>
+              <a:t>С++)</a:t>
             </a:r>
           </a:p>
           <a:p>
@@ -6945,7 +6953,15 @@
             <a:pPr rtl="0"/>
             <a:r>
               <a:rPr lang="ru-RU" sz="1150" kern="0" dirty="0"/>
-              <a:t>Более 15 лет занимался прикладной математикой и мат моделированием</a:t>
+              <a:t>Более </a:t>
+            </a:r>
+            <a:r>
+              <a:rPr lang="ru-RU" sz="1150" dirty="0"/>
+              <a:t>20</a:t>
+            </a:r>
+            <a:r>
+              <a:rPr lang="ru-RU" sz="1150" kern="0" dirty="0"/>
+              <a:t> лет занимался прикладной математикой и мат моделированием</a:t>
             </a:r>
           </a:p>
           <a:p>
@@ -6960,7 +6976,7 @@
             </a:r>
             <a:r>
               <a:rPr lang="ru-RU" sz="1150" kern="0" dirty="0"/>
-              <a:t>С++) в НИИ ПАО Газпром</a:t>
+              <a:t>С++)</a:t>
             </a:r>
           </a:p>
           <a:p>
@@ -9150,14 +9166,14 @@
               </a:spcBef>
             </a:pPr>
             <a:r>
-              <a:rPr lang="en-US" sz="1400" dirty="0">
+              <a:rPr lang="ru-RU" sz="1400" dirty="0">
                 <a:solidFill>
                   <a:schemeClr val="tx1"/>
                 </a:solidFill>
                 <a:latin typeface="Calibri"/>
                 <a:cs typeface="Calibri"/>
               </a:rPr>
-              <a:t>27</a:t>
+              <a:t>08</a:t>
             </a:r>
             <a:r>
               <a:rPr sz="1400" dirty="0">
@@ -9177,7 +9193,17 @@
                 <a:latin typeface="Calibri"/>
                 <a:cs typeface="Calibri"/>
               </a:rPr>
-              <a:t>05</a:t>
+              <a:t>0</a:t>
+            </a:r>
+            <a:r>
+              <a:rPr lang="ru-RU" sz="1400" dirty="0">
+                <a:solidFill>
+                  <a:schemeClr val="tx1"/>
+                </a:solidFill>
+                <a:latin typeface="Calibri"/>
+                <a:cs typeface="Calibri"/>
+              </a:rPr>
+              <a:t>9</a:t>
             </a:r>
             <a:r>
               <a:rPr sz="1400" spc="-40" dirty="0">
@@ -9243,7 +9269,14 @@
                 <a:latin typeface="Calibri"/>
                 <a:cs typeface="Calibri"/>
               </a:rPr>
-              <a:t>23</a:t>
+              <a:t>2</a:t>
+            </a:r>
+            <a:r>
+              <a:rPr lang="ru-RU" sz="1400" dirty="0">
+                <a:latin typeface="Calibri"/>
+                <a:cs typeface="Calibri"/>
+              </a:rPr>
+              <a:t>2</a:t>
             </a:r>
             <a:r>
               <a:rPr sz="1400" dirty="0">
@@ -9257,7 +9290,14 @@
                 <a:latin typeface="Calibri"/>
                 <a:cs typeface="Calibri"/>
               </a:rPr>
-              <a:t>06</a:t>
+              <a:t>0</a:t>
+            </a:r>
+            <a:r>
+              <a:rPr lang="ru-RU" sz="1400" dirty="0">
+                <a:latin typeface="Calibri"/>
+                <a:cs typeface="Calibri"/>
+              </a:rPr>
+              <a:t>9</a:t>
             </a:r>
             <a:r>
               <a:rPr sz="1400" spc="-35" dirty="0">
@@ -9314,7 +9354,14 @@
                 <a:latin typeface="Calibri"/>
                 <a:cs typeface="Calibri"/>
               </a:rPr>
-              <a:t>01</a:t>
+              <a:t>0</a:t>
+            </a:r>
+            <a:r>
+              <a:rPr lang="ru-RU" sz="1400" dirty="0">
+                <a:latin typeface="Calibri"/>
+                <a:cs typeface="Calibri"/>
+              </a:rPr>
+              <a:t>7</a:t>
             </a:r>
             <a:r>
               <a:rPr sz="1400" dirty="0">
@@ -9324,11 +9371,11 @@
               <a:t>.</a:t>
             </a:r>
             <a:r>
-              <a:rPr lang="en-US" sz="1400" dirty="0">
+              <a:rPr lang="ru-RU" sz="1400" dirty="0">
                 <a:latin typeface="Calibri"/>
                 <a:cs typeface="Calibri"/>
               </a:rPr>
-              <a:t>07</a:t>
+              <a:t>10</a:t>
             </a:r>
             <a:r>
               <a:rPr sz="1400" spc="-35" dirty="0">
@@ -9387,11 +9434,11 @@
               </a:spcBef>
             </a:pPr>
             <a:r>
-              <a:rPr lang="en-US" sz="1400" dirty="0">
+              <a:rPr lang="ru-RU" sz="1400" dirty="0">
                 <a:latin typeface="Calibri"/>
                 <a:cs typeface="Calibri"/>
               </a:rPr>
-              <a:t>04</a:t>
+              <a:t>15</a:t>
             </a:r>
             <a:r>
               <a:rPr sz="1400" dirty="0">
@@ -9401,11 +9448,11 @@
               <a:t>.</a:t>
             </a:r>
             <a:r>
-              <a:rPr lang="en-US" sz="1400" dirty="0">
+              <a:rPr lang="ru-RU" sz="1400" dirty="0">
                 <a:latin typeface="Calibri"/>
                 <a:cs typeface="Calibri"/>
               </a:rPr>
-              <a:t>07</a:t>
+              <a:t>10</a:t>
             </a:r>
             <a:r>
               <a:rPr sz="1400" spc="-35" dirty="0">

--- a/MLOps/42 - Course project/Course project.pptx
+++ b/MLOps/42 - Course project/Course project.pptx
@@ -128,7 +128,7 @@
           <a:p>
             <a:fld id="{CED1C788-56A1-2E45-A024-5C42A74F7F0E}" type="datetimeFigureOut">
               <a:rPr lang="en-US" smtClean="0"/>
-              <a:t>9/8/25</a:t>
+              <a:t>12/11/25</a:t>
             </a:fld>
             <a:endParaRPr lang="en-US"/>
           </a:p>
@@ -1757,7 +1757,7 @@
           <a:p>
             <a:fld id="{1D8BD707-D9CF-40AE-B4C6-C98DA3205C09}" type="datetimeFigureOut">
               <a:rPr lang="en-US"/>
-              <a:t>9/8/25</a:t>
+              <a:t>12/11/25</a:t>
             </a:fld>
             <a:endParaRPr lang="en-US"/>
           </a:p>
@@ -1934,7 +1934,7 @@
           <a:p>
             <a:fld id="{1D8BD707-D9CF-40AE-B4C6-C98DA3205C09}" type="datetimeFigureOut">
               <a:rPr lang="en-US"/>
-              <a:t>9/8/25</a:t>
+              <a:t>12/11/25</a:t>
             </a:fld>
             <a:endParaRPr lang="en-US"/>
           </a:p>
@@ -2160,7 +2160,7 @@
           <a:p>
             <a:fld id="{1D8BD707-D9CF-40AE-B4C6-C98DA3205C09}" type="datetimeFigureOut">
               <a:rPr lang="en-US"/>
-              <a:t>9/8/25</a:t>
+              <a:t>12/11/25</a:t>
             </a:fld>
             <a:endParaRPr lang="en-US"/>
           </a:p>
@@ -2338,7 +2338,7 @@
           <a:p>
             <a:fld id="{1D8BD707-D9CF-40AE-B4C6-C98DA3205C09}" type="datetimeFigureOut">
               <a:rPr lang="en-US"/>
-              <a:t>9/8/25</a:t>
+              <a:t>12/11/25</a:t>
             </a:fld>
             <a:endParaRPr lang="en-US"/>
           </a:p>
@@ -2457,7 +2457,7 @@
           <a:p>
             <a:fld id="{1D8BD707-D9CF-40AE-B4C6-C98DA3205C09}" type="datetimeFigureOut">
               <a:rPr lang="en-US"/>
-              <a:t>9/8/25</a:t>
+              <a:t>12/11/25</a:t>
             </a:fld>
             <a:endParaRPr lang="en-US"/>
           </a:p>
@@ -4609,7 +4609,7 @@
           <a:p>
             <a:fld id="{1D8BD707-D9CF-40AE-B4C6-C98DA3205C09}" type="datetimeFigureOut">
               <a:rPr lang="en-US"/>
-              <a:t>9/8/25</a:t>
+              <a:t>12/11/25</a:t>
             </a:fld>
             <a:endParaRPr lang="en-US"/>
           </a:p>
@@ -9243,8 +9243,8 @@
         </p:nvSpPr>
         <p:spPr>
           <a:xfrm>
-            <a:off x="1233721" y="2455164"/>
-            <a:ext cx="526415" cy="228268"/>
+            <a:off x="1033729" y="2455164"/>
+            <a:ext cx="726408" cy="228268"/>
           </a:xfrm>
           <a:prstGeom prst="rect">
             <a:avLst/>
@@ -9265,55 +9265,69 @@
               </a:spcBef>
             </a:pPr>
             <a:r>
-              <a:rPr lang="en-US" sz="1400" dirty="0">
+              <a:rPr lang="en-US" sz="1400" b="1" dirty="0">
+                <a:solidFill>
+                  <a:srgbClr val="FF0000"/>
+                </a:solidFill>
                 <a:latin typeface="Calibri"/>
                 <a:cs typeface="Calibri"/>
               </a:rPr>
               <a:t>2</a:t>
             </a:r>
             <a:r>
-              <a:rPr lang="ru-RU" sz="1400" dirty="0">
+              <a:rPr lang="ru-RU" sz="1400" b="1" dirty="0">
+                <a:solidFill>
+                  <a:srgbClr val="FF0000"/>
+                </a:solidFill>
                 <a:latin typeface="Calibri"/>
                 <a:cs typeface="Calibri"/>
               </a:rPr>
-              <a:t>2</a:t>
-            </a:r>
-            <a:r>
-              <a:rPr sz="1400" dirty="0">
+              <a:t>6</a:t>
+            </a:r>
+            <a:r>
+              <a:rPr sz="1400" b="1" dirty="0">
+                <a:solidFill>
+                  <a:srgbClr val="FF0000"/>
+                </a:solidFill>
                 <a:latin typeface="Calibri"/>
                 <a:cs typeface="Calibri"/>
               </a:rPr>
               <a:t>.</a:t>
             </a:r>
             <a:r>
-              <a:rPr lang="en-US" sz="1400" dirty="0">
+              <a:rPr lang="ru-RU" sz="1400" b="1" dirty="0">
+                <a:solidFill>
+                  <a:srgbClr val="FF0000"/>
+                </a:solidFill>
                 <a:latin typeface="Calibri"/>
                 <a:cs typeface="Calibri"/>
               </a:rPr>
-              <a:t>0</a:t>
-            </a:r>
-            <a:r>
-              <a:rPr lang="ru-RU" sz="1400" dirty="0">
+              <a:t>12 ?</a:t>
+            </a:r>
+            <a:r>
+              <a:rPr sz="1400" b="1" spc="-35" dirty="0">
+                <a:solidFill>
+                  <a:srgbClr val="FF0000"/>
+                </a:solidFill>
                 <a:latin typeface="Calibri"/>
                 <a:cs typeface="Calibri"/>
               </a:rPr>
-              <a:t>9</a:t>
-            </a:r>
-            <a:r>
-              <a:rPr sz="1400" spc="-35" dirty="0">
+              <a:t> </a:t>
+            </a:r>
+            <a:r>
+              <a:rPr sz="1400" b="1" spc="-50" dirty="0">
+                <a:solidFill>
+                  <a:srgbClr val="FF0000"/>
+                </a:solidFill>
                 <a:latin typeface="Calibri"/>
                 <a:cs typeface="Calibri"/>
               </a:rPr>
-              <a:t> </a:t>
-            </a:r>
-            <a:r>
-              <a:rPr sz="1400" spc="-50" dirty="0">
-                <a:latin typeface="Calibri"/>
-                <a:cs typeface="Calibri"/>
-              </a:rPr>
               <a:t>-</a:t>
             </a:r>
-            <a:endParaRPr sz="1400" dirty="0">
+            <a:endParaRPr sz="1400" b="1" dirty="0">
+              <a:solidFill>
+                <a:srgbClr val="FF0000"/>
+              </a:solidFill>
               <a:latin typeface="Calibri"/>
               <a:cs typeface="Calibri"/>
             </a:endParaRPr>
@@ -9328,8 +9342,8 @@
         </p:nvSpPr>
         <p:spPr>
           <a:xfrm>
-            <a:off x="1237928" y="2982467"/>
-            <a:ext cx="526415" cy="228268"/>
+            <a:off x="990600" y="2982467"/>
+            <a:ext cx="773743" cy="228268"/>
           </a:xfrm>
           <a:prstGeom prst="rect">
             <a:avLst/>
@@ -9350,48 +9364,29 @@
               </a:spcBef>
             </a:pPr>
             <a:r>
-              <a:rPr lang="en-US" sz="1400" dirty="0">
+              <a:rPr lang="ru-RU" sz="1400" b="1" dirty="0">
+                <a:solidFill>
+                  <a:srgbClr val="FF0000"/>
+                </a:solidFill>
                 <a:latin typeface="Calibri"/>
                 <a:cs typeface="Calibri"/>
               </a:rPr>
-              <a:t>0</a:t>
-            </a:r>
-            <a:r>
-              <a:rPr lang="ru-RU" sz="1400" dirty="0">
+              <a:t>15.01 ? </a:t>
+            </a:r>
+            <a:r>
+              <a:rPr sz="1400" b="1" spc="-50" dirty="0">
+                <a:solidFill>
+                  <a:srgbClr val="FF0000"/>
+                </a:solidFill>
                 <a:latin typeface="Calibri"/>
                 <a:cs typeface="Calibri"/>
               </a:rPr>
-              <a:t>7</a:t>
-            </a:r>
-            <a:r>
-              <a:rPr sz="1400" dirty="0">
-                <a:latin typeface="Calibri"/>
-                <a:cs typeface="Calibri"/>
-              </a:rPr>
-              <a:t>.</a:t>
-            </a:r>
-            <a:r>
-              <a:rPr lang="ru-RU" sz="1400" dirty="0">
-                <a:latin typeface="Calibri"/>
-                <a:cs typeface="Calibri"/>
-              </a:rPr>
-              <a:t>10</a:t>
-            </a:r>
-            <a:r>
-              <a:rPr sz="1400" spc="-35" dirty="0">
-                <a:latin typeface="Calibri"/>
-                <a:cs typeface="Calibri"/>
-              </a:rPr>
-              <a:t> </a:t>
-            </a:r>
-            <a:r>
-              <a:rPr sz="1400" spc="-50" dirty="0">
-                <a:latin typeface="Calibri"/>
-                <a:cs typeface="Calibri"/>
-              </a:rPr>
               <a:t>-</a:t>
             </a:r>
-            <a:endParaRPr sz="1400" dirty="0">
+            <a:endParaRPr sz="1400" b="1" dirty="0">
+              <a:solidFill>
+                <a:srgbClr val="FF0000"/>
+              </a:solidFill>
               <a:latin typeface="Calibri"/>
               <a:cs typeface="Calibri"/>
             </a:endParaRPr>
@@ -9438,7 +9433,7 @@
                 <a:latin typeface="Calibri"/>
                 <a:cs typeface="Calibri"/>
               </a:rPr>
-              <a:t>15</a:t>
+              <a:t>16</a:t>
             </a:r>
             <a:r>
               <a:rPr sz="1400" dirty="0">
@@ -9452,7 +9447,7 @@
                 <a:latin typeface="Calibri"/>
                 <a:cs typeface="Calibri"/>
               </a:rPr>
-              <a:t>10</a:t>
+              <a:t>02</a:t>
             </a:r>
             <a:r>
               <a:rPr sz="1400" spc="-35" dirty="0">

--- a/MLOps/42 - Course project/Course project.pptx
+++ b/MLOps/42 - Course project/Course project.pptx
@@ -128,7 +128,7 @@
           <a:p>
             <a:fld id="{CED1C788-56A1-2E45-A024-5C42A74F7F0E}" type="datetimeFigureOut">
               <a:rPr lang="en-US" smtClean="0"/>
-              <a:t>12/11/25</a:t>
+              <a:t>3/23/26</a:t>
             </a:fld>
             <a:endParaRPr lang="en-US"/>
           </a:p>
@@ -1757,7 +1757,7 @@
           <a:p>
             <a:fld id="{1D8BD707-D9CF-40AE-B4C6-C98DA3205C09}" type="datetimeFigureOut">
               <a:rPr lang="en-US"/>
-              <a:t>12/11/25</a:t>
+              <a:t>3/23/26</a:t>
             </a:fld>
             <a:endParaRPr lang="en-US"/>
           </a:p>
@@ -1934,7 +1934,7 @@
           <a:p>
             <a:fld id="{1D8BD707-D9CF-40AE-B4C6-C98DA3205C09}" type="datetimeFigureOut">
               <a:rPr lang="en-US"/>
-              <a:t>12/11/25</a:t>
+              <a:t>3/23/26</a:t>
             </a:fld>
             <a:endParaRPr lang="en-US"/>
           </a:p>
@@ -2160,7 +2160,7 @@
           <a:p>
             <a:fld id="{1D8BD707-D9CF-40AE-B4C6-C98DA3205C09}" type="datetimeFigureOut">
               <a:rPr lang="en-US"/>
-              <a:t>12/11/25</a:t>
+              <a:t>3/23/26</a:t>
             </a:fld>
             <a:endParaRPr lang="en-US"/>
           </a:p>
@@ -2338,7 +2338,7 @@
           <a:p>
             <a:fld id="{1D8BD707-D9CF-40AE-B4C6-C98DA3205C09}" type="datetimeFigureOut">
               <a:rPr lang="en-US"/>
-              <a:t>12/11/25</a:t>
+              <a:t>3/23/26</a:t>
             </a:fld>
             <a:endParaRPr lang="en-US"/>
           </a:p>
@@ -2457,7 +2457,7 @@
           <a:p>
             <a:fld id="{1D8BD707-D9CF-40AE-B4C6-C98DA3205C09}" type="datetimeFigureOut">
               <a:rPr lang="en-US"/>
-              <a:t>12/11/25</a:t>
+              <a:t>3/23/26</a:t>
             </a:fld>
             <a:endParaRPr lang="en-US"/>
           </a:p>
@@ -4609,7 +4609,7 @@
           <a:p>
             <a:fld id="{1D8BD707-D9CF-40AE-B4C6-C98DA3205C09}" type="datetimeFigureOut">
               <a:rPr lang="en-US"/>
-              <a:t>12/11/25</a:t>
+              <a:t>3/23/26</a:t>
             </a:fld>
             <a:endParaRPr lang="en-US"/>
           </a:p>
@@ -9173,7 +9173,7 @@
                 <a:latin typeface="Calibri"/>
                 <a:cs typeface="Calibri"/>
               </a:rPr>
-              <a:t>08</a:t>
+              <a:t>23</a:t>
             </a:r>
             <a:r>
               <a:rPr sz="1400" dirty="0">
@@ -9203,7 +9203,7 @@
                 <a:latin typeface="Calibri"/>
                 <a:cs typeface="Calibri"/>
               </a:rPr>
-              <a:t>9</a:t>
+              <a:t>3</a:t>
             </a:r>
             <a:r>
               <a:rPr sz="1400" spc="-40" dirty="0">
@@ -9265,64 +9265,64 @@
               </a:spcBef>
             </a:pPr>
             <a:r>
-              <a:rPr lang="en-US" sz="1400" b="1" dirty="0">
+              <a:rPr lang="ru-RU" sz="1400" b="1" dirty="0">
                 <a:solidFill>
                   <a:srgbClr val="FF0000"/>
                 </a:solidFill>
                 <a:latin typeface="Calibri"/>
                 <a:cs typeface="Calibri"/>
               </a:rPr>
-              <a:t>2</a:t>
-            </a:r>
-            <a:r>
-              <a:rPr lang="ru-RU" sz="1400" b="1" dirty="0">
+              <a:t>16</a:t>
+            </a:r>
+            <a:r>
+              <a:rPr sz="1400" b="1" dirty="0">
                 <a:solidFill>
                   <a:srgbClr val="FF0000"/>
                 </a:solidFill>
                 <a:latin typeface="Calibri"/>
                 <a:cs typeface="Calibri"/>
               </a:rPr>
-              <a:t>6</a:t>
-            </a:r>
-            <a:r>
-              <a:rPr sz="1400" b="1" dirty="0">
+              <a:t>.</a:t>
+            </a:r>
+            <a:r>
+              <a:rPr lang="ru-RU" sz="1400" b="1" dirty="0">
                 <a:solidFill>
                   <a:srgbClr val="FF0000"/>
                 </a:solidFill>
                 <a:latin typeface="Calibri"/>
                 <a:cs typeface="Calibri"/>
               </a:rPr>
-              <a:t>.</a:t>
-            </a:r>
-            <a:r>
-              <a:rPr lang="ru-RU" sz="1400" b="1" dirty="0">
+              <a:t>04</a:t>
+            </a:r>
+            <a:r>
+              <a:rPr sz="1400" b="1" spc="-35" dirty="0">
                 <a:solidFill>
                   <a:srgbClr val="FF0000"/>
                 </a:solidFill>
                 <a:latin typeface="Calibri"/>
                 <a:cs typeface="Calibri"/>
               </a:rPr>
-              <a:t>12 ?</a:t>
-            </a:r>
-            <a:r>
-              <a:rPr sz="1400" b="1" spc="-35" dirty="0">
+              <a:t> </a:t>
+            </a:r>
+            <a:r>
+              <a:rPr sz="1400" b="1" spc="-50" dirty="0">
                 <a:solidFill>
                   <a:srgbClr val="FF0000"/>
                 </a:solidFill>
                 <a:latin typeface="Calibri"/>
                 <a:cs typeface="Calibri"/>
               </a:rPr>
-              <a:t> </a:t>
-            </a:r>
-            <a:r>
-              <a:rPr sz="1400" b="1" spc="-50" dirty="0">
+              <a:t>-</a:t>
+            </a:r>
+            <a:r>
+              <a:rPr lang="ru-RU" sz="1400" b="1" spc="-50" dirty="0">
                 <a:solidFill>
                   <a:srgbClr val="FF0000"/>
                 </a:solidFill>
                 <a:latin typeface="Calibri"/>
                 <a:cs typeface="Calibri"/>
               </a:rPr>
-              <a:t>-</a:t>
+              <a:t> ?</a:t>
             </a:r>
             <a:endParaRPr sz="1400" b="1" dirty="0">
               <a:solidFill>
@@ -9371,7 +9371,7 @@
                 <a:latin typeface="Calibri"/>
                 <a:cs typeface="Calibri"/>
               </a:rPr>
-              <a:t>15.01 ? </a:t>
+              <a:t>15.05 </a:t>
             </a:r>
             <a:r>
               <a:rPr sz="1400" b="1" spc="-50" dirty="0">
@@ -9382,6 +9382,16 @@
                 <a:cs typeface="Calibri"/>
               </a:rPr>
               <a:t>-</a:t>
+            </a:r>
+            <a:r>
+              <a:rPr lang="ru-RU" sz="1400" b="1" spc="-50" dirty="0">
+                <a:solidFill>
+                  <a:srgbClr val="FF0000"/>
+                </a:solidFill>
+                <a:latin typeface="Calibri"/>
+                <a:cs typeface="Calibri"/>
+              </a:rPr>
+              <a:t> ?</a:t>
             </a:r>
             <a:endParaRPr sz="1400" b="1" dirty="0">
               <a:solidFill>
@@ -9433,7 +9443,7 @@
                 <a:latin typeface="Calibri"/>
                 <a:cs typeface="Calibri"/>
               </a:rPr>
-              <a:t>16</a:t>
+              <a:t>15</a:t>
             </a:r>
             <a:r>
               <a:rPr sz="1400" dirty="0">
@@ -9447,21 +9457,7 @@
                 <a:latin typeface="Calibri"/>
                 <a:cs typeface="Calibri"/>
               </a:rPr>
-              <a:t>02</a:t>
-            </a:r>
-            <a:r>
-              <a:rPr sz="1400" spc="-35" dirty="0">
-                <a:latin typeface="Calibri"/>
-                <a:cs typeface="Calibri"/>
-              </a:rPr>
-              <a:t> </a:t>
-            </a:r>
-            <a:r>
-              <a:rPr sz="1400" spc="-50" dirty="0">
-                <a:latin typeface="Calibri"/>
-                <a:cs typeface="Calibri"/>
-              </a:rPr>
-              <a:t>-</a:t>
+              <a:t>05</a:t>
             </a:r>
             <a:endParaRPr sz="1400" dirty="0">
               <a:latin typeface="Calibri"/>
